--- a/cviceni/cv3/uvin_cv3.pptx
+++ b/cviceni/cv3/uvin_cv3.pptx
@@ -111,6 +111,11 @@
       </a:defRPr>
     </a:lvl9pPr>
   </p:defaultTextStyle>
+  <p:extLst>
+    <p:ext uri="{EFAFB233-063F-42B5-8137-9DF3F51BA10A}">
+      <p15:sldGuideLst xmlns:p15="http://schemas.microsoft.com/office/powerpoint/2012/main"/>
+    </p:ext>
+  </p:extLst>
 </p:presentation>
 </file>
 
@@ -3458,13 +3463,13 @@
             <p:ph idx="1"/>
             <p:extLst>
               <p:ext uri="{D42A27DB-BD31-4B8C-83A1-F6EECF244321}">
-                <p14:modId xmlns:p14="http://schemas.microsoft.com/office/powerpoint/2010/main" val="3306005074"/>
+                <p14:modId xmlns:p14="http://schemas.microsoft.com/office/powerpoint/2010/main" val="1204935165"/>
               </p:ext>
             </p:extLst>
           </p:nvPr>
         </p:nvGraphicFramePr>
         <p:xfrm>
-          <a:off x="1872142" y="3651250"/>
+          <a:off x="1846975" y="3429000"/>
           <a:ext cx="8599008" cy="2133600"/>
         </p:xfrm>
         <a:graphic>
@@ -4339,7 +4344,7 @@
         <p:spPr>
           <a:xfrm>
             <a:off x="692092" y="1730036"/>
-            <a:ext cx="8738182" cy="1384995"/>
+            <a:ext cx="8738182" cy="4431983"/>
           </a:xfrm>
           <a:prstGeom prst="rect">
             <a:avLst/>
@@ -4712,10 +4717,162 @@
             </a:r>
             <a:endParaRPr lang="cs-CZ" sz="1800" dirty="0">
               <a:effectLst/>
+              <a:latin typeface="+mn-lt"/>
+              <a:ea typeface="Cambria" panose="02040503050406030204" pitchFamily="18" charset="0"/>
+              <a:cs typeface="Times New Roman" panose="02020603050405020304" pitchFamily="18" charset="0"/>
+            </a:endParaRPr>
+          </a:p>
+          <a:p>
+            <a:pPr>
+              <a:spcBef>
+                <a:spcPts val="900"/>
+              </a:spcBef>
+              <a:spcAft>
+                <a:spcPts val="900"/>
+              </a:spcAft>
+              <a:buNone/>
+            </a:pPr>
+            <a:endParaRPr lang="cs-CZ" dirty="0">
+              <a:ea typeface="Cambria" panose="02040503050406030204" pitchFamily="18" charset="0"/>
+              <a:cs typeface="Times New Roman" panose="02020603050405020304" pitchFamily="18" charset="0"/>
+            </a:endParaRPr>
+          </a:p>
+          <a:p>
+            <a:pPr>
+              <a:spcBef>
+                <a:spcPts val="900"/>
+              </a:spcBef>
+              <a:spcAft>
+                <a:spcPts val="900"/>
+              </a:spcAft>
+              <a:buNone/>
+            </a:pPr>
+            <a:endParaRPr lang="cs-CZ" sz="1800" dirty="0">
+              <a:effectLst/>
               <a:latin typeface="Cambria" panose="02040503050406030204" pitchFamily="18" charset="0"/>
               <a:ea typeface="Cambria" panose="02040503050406030204" pitchFamily="18" charset="0"/>
               <a:cs typeface="Times New Roman" panose="02020603050405020304" pitchFamily="18" charset="0"/>
             </a:endParaRPr>
+          </a:p>
+          <a:p>
+            <a:pPr>
+              <a:spcBef>
+                <a:spcPts val="900"/>
+              </a:spcBef>
+              <a:spcAft>
+                <a:spcPts val="900"/>
+              </a:spcAft>
+              <a:buNone/>
+            </a:pPr>
+            <a:endParaRPr lang="cs-CZ" dirty="0">
+              <a:latin typeface="Cambria" panose="02040503050406030204" pitchFamily="18" charset="0"/>
+              <a:ea typeface="Cambria" panose="02040503050406030204" pitchFamily="18" charset="0"/>
+              <a:cs typeface="Times New Roman" panose="02020603050405020304" pitchFamily="18" charset="0"/>
+            </a:endParaRPr>
+          </a:p>
+          <a:p>
+            <a:pPr>
+              <a:spcBef>
+                <a:spcPts val="900"/>
+              </a:spcBef>
+              <a:spcAft>
+                <a:spcPts val="900"/>
+              </a:spcAft>
+              <a:buNone/>
+            </a:pPr>
+            <a:endParaRPr lang="cs-CZ" sz="1800" dirty="0">
+              <a:effectLst/>
+              <a:latin typeface="Cambria" panose="02040503050406030204" pitchFamily="18" charset="0"/>
+              <a:ea typeface="Cambria" panose="02040503050406030204" pitchFamily="18" charset="0"/>
+              <a:cs typeface="Times New Roman" panose="02020603050405020304" pitchFamily="18" charset="0"/>
+            </a:endParaRPr>
+          </a:p>
+          <a:p>
+            <a:pPr>
+              <a:spcBef>
+                <a:spcPts val="900"/>
+              </a:spcBef>
+              <a:spcAft>
+                <a:spcPts val="900"/>
+              </a:spcAft>
+              <a:buNone/>
+            </a:pPr>
+            <a:endParaRPr lang="cs-CZ" dirty="0">
+              <a:latin typeface="Cambria" panose="02040503050406030204" pitchFamily="18" charset="0"/>
+              <a:ea typeface="Cambria" panose="02040503050406030204" pitchFamily="18" charset="0"/>
+              <a:cs typeface="Times New Roman" panose="02020603050405020304" pitchFamily="18" charset="0"/>
+            </a:endParaRPr>
+          </a:p>
+          <a:p>
+            <a:pPr>
+              <a:spcBef>
+                <a:spcPts val="900"/>
+              </a:spcBef>
+              <a:spcAft>
+                <a:spcPts val="900"/>
+              </a:spcAft>
+            </a:pPr>
+            <a:r>
+              <a:rPr lang="en-US"/>
+              <a:t>Použití</a:t>
+            </a:r>
+            <a:r>
+              <a:rPr lang="en-US" dirty="0"/>
+              <a:t> AI: </a:t>
+            </a:r>
+            <a:r>
+              <a:rPr lang="en-US" dirty="0" err="1"/>
+              <a:t>navrhn</a:t>
+            </a:r>
+            <a:r>
+              <a:rPr lang="cs-CZ" dirty="0" err="1"/>
+              <a:t>ěte</a:t>
+            </a:r>
+            <a:r>
+              <a:rPr lang="en-US" dirty="0"/>
+              <a:t> </a:t>
+            </a:r>
+            <a:r>
+              <a:rPr lang="en-US" dirty="0" err="1"/>
+              <a:t>částku</a:t>
+            </a:r>
+            <a:r>
+              <a:rPr lang="en-US" dirty="0"/>
+              <a:t>, pro </a:t>
+            </a:r>
+            <a:r>
+              <a:rPr lang="en-US" dirty="0" err="1"/>
+              <a:t>kterou</a:t>
+            </a:r>
+            <a:r>
+              <a:rPr lang="en-US" dirty="0"/>
+              <a:t> </a:t>
+            </a:r>
+            <a:r>
+              <a:rPr lang="en-US" dirty="0" err="1"/>
+              <a:t>algoritmus</a:t>
+            </a:r>
+            <a:r>
+              <a:rPr lang="en-US" dirty="0"/>
+              <a:t> </a:t>
+            </a:r>
+            <a:r>
+              <a:rPr lang="en-US" dirty="0" err="1"/>
+              <a:t>nebude</a:t>
+            </a:r>
+            <a:r>
+              <a:rPr lang="en-US" dirty="0"/>
+              <a:t> </a:t>
+            </a:r>
+            <a:r>
+              <a:rPr lang="en-US" dirty="0" err="1"/>
+              <a:t>fungovat</a:t>
+            </a:r>
+            <a:r>
+              <a:rPr lang="en-US" dirty="0"/>
+              <a:t>.</a:t>
+            </a:r>
+            <a:endParaRPr lang="cs-CZ" dirty="0"/>
           </a:p>
         </p:txBody>
       </p:sp>
@@ -4798,8 +4955,8 @@
           </a:p>
         </p:txBody>
       </p:sp>
-      <mc:AlternateContent xmlns:mc="http://schemas.openxmlformats.org/markup-compatibility/2006">
-        <mc:Choice xmlns:a14="http://schemas.microsoft.com/office/drawing/2010/main" Requires="a14">
+      <mc:AlternateContent xmlns:mc="http://schemas.openxmlformats.org/markup-compatibility/2006" xmlns:a14="http://schemas.microsoft.com/office/drawing/2010/main">
+        <mc:Choice Requires="a14">
           <p:sp>
             <p:nvSpPr>
               <p:cNvPr id="3" name="Zástupný obsah 2">
@@ -4851,38 +5008,54 @@
                 <a14:m>
                   <m:oMath xmlns:m="http://schemas.openxmlformats.org/officeDocument/2006/math">
                     <m:r>
-                      <a:rPr lang="cs-CZ" i="1"/>
+                      <a:rPr lang="cs-CZ" i="1">
+                        <a:latin typeface="Cambria Math" panose="02040503050406030204" pitchFamily="18" charset="0"/>
+                      </a:rPr>
                       <m:t>𝑢</m:t>
                     </m:r>
                     <m:r>
-                      <a:rPr lang="cs-CZ"/>
+                      <a:rPr lang="cs-CZ">
+                        <a:latin typeface="Cambria Math" panose="02040503050406030204" pitchFamily="18" charset="0"/>
+                      </a:rPr>
                       <m:t>=</m:t>
                     </m:r>
                     <m:d>
                       <m:dPr>
                         <m:ctrlPr>
-                          <a:rPr lang="cs-CZ" i="1"/>
+                          <a:rPr lang="cs-CZ" i="1">
+                            <a:latin typeface="Cambria Math" panose="02040503050406030204" pitchFamily="18" charset="0"/>
+                          </a:rPr>
                         </m:ctrlPr>
                       </m:dPr>
                       <m:e>
                         <m:r>
-                          <a:rPr lang="cs-CZ" i="1"/>
+                          <a:rPr lang="cs-CZ" i="1">
+                            <a:latin typeface="Cambria Math" panose="02040503050406030204" pitchFamily="18" charset="0"/>
+                          </a:rPr>
                           <m:t>1</m:t>
                         </m:r>
                         <m:r>
-                          <a:rPr lang="cs-CZ"/>
+                          <a:rPr lang="cs-CZ">
+                            <a:latin typeface="Cambria Math" panose="02040503050406030204" pitchFamily="18" charset="0"/>
+                          </a:rPr>
                           <m:t>,</m:t>
                         </m:r>
                         <m:r>
-                          <a:rPr lang="cs-CZ" i="1"/>
+                          <a:rPr lang="cs-CZ" i="1">
+                            <a:latin typeface="Cambria Math" panose="02040503050406030204" pitchFamily="18" charset="0"/>
+                          </a:rPr>
                           <m:t>0</m:t>
                         </m:r>
                         <m:r>
-                          <a:rPr lang="cs-CZ"/>
+                          <a:rPr lang="cs-CZ">
+                            <a:latin typeface="Cambria Math" panose="02040503050406030204" pitchFamily="18" charset="0"/>
+                          </a:rPr>
                           <m:t>,</m:t>
                         </m:r>
                         <m:r>
-                          <a:rPr lang="cs-CZ" i="1"/>
+                          <a:rPr lang="cs-CZ" i="1">
+                            <a:latin typeface="Cambria Math" panose="02040503050406030204" pitchFamily="18" charset="0"/>
+                          </a:rPr>
                           <m:t>0</m:t>
                         </m:r>
                       </m:e>
@@ -4896,38 +5069,54 @@
                 <a14:m>
                   <m:oMath xmlns:m="http://schemas.openxmlformats.org/officeDocument/2006/math">
                     <m:r>
-                      <a:rPr lang="cs-CZ" i="1"/>
+                      <a:rPr lang="cs-CZ" i="1">
+                        <a:latin typeface="Cambria Math" panose="02040503050406030204" pitchFamily="18" charset="0"/>
+                      </a:rPr>
                       <m:t>𝑣</m:t>
                     </m:r>
                     <m:r>
-                      <a:rPr lang="cs-CZ"/>
+                      <a:rPr lang="cs-CZ">
+                        <a:latin typeface="Cambria Math" panose="02040503050406030204" pitchFamily="18" charset="0"/>
+                      </a:rPr>
                       <m:t>=</m:t>
                     </m:r>
                     <m:d>
                       <m:dPr>
                         <m:ctrlPr>
-                          <a:rPr lang="cs-CZ" i="1"/>
+                          <a:rPr lang="cs-CZ" i="1">
+                            <a:latin typeface="Cambria Math" panose="02040503050406030204" pitchFamily="18" charset="0"/>
+                          </a:rPr>
                         </m:ctrlPr>
                       </m:dPr>
                       <m:e>
                         <m:r>
-                          <a:rPr lang="cs-CZ" i="1"/>
+                          <a:rPr lang="cs-CZ" i="1">
+                            <a:latin typeface="Cambria Math" panose="02040503050406030204" pitchFamily="18" charset="0"/>
+                          </a:rPr>
                           <m:t>0</m:t>
                         </m:r>
                         <m:r>
-                          <a:rPr lang="cs-CZ"/>
+                          <a:rPr lang="cs-CZ">
+                            <a:latin typeface="Cambria Math" panose="02040503050406030204" pitchFamily="18" charset="0"/>
+                          </a:rPr>
                           <m:t>,</m:t>
                         </m:r>
                         <m:r>
-                          <a:rPr lang="cs-CZ" i="1"/>
+                          <a:rPr lang="cs-CZ" i="1">
+                            <a:latin typeface="Cambria Math" panose="02040503050406030204" pitchFamily="18" charset="0"/>
+                          </a:rPr>
                           <m:t>0</m:t>
                         </m:r>
                         <m:r>
-                          <a:rPr lang="cs-CZ"/>
+                          <a:rPr lang="cs-CZ">
+                            <a:latin typeface="Cambria Math" panose="02040503050406030204" pitchFamily="18" charset="0"/>
+                          </a:rPr>
                           <m:t>,</m:t>
                         </m:r>
                         <m:r>
-                          <a:rPr lang="cs-CZ" i="1"/>
+                          <a:rPr lang="cs-CZ" i="1">
+                            <a:latin typeface="Cambria Math" panose="02040503050406030204" pitchFamily="18" charset="0"/>
+                          </a:rPr>
                           <m:t>1</m:t>
                         </m:r>
                       </m:e>
@@ -5003,27 +5192,37 @@
                             </m:mc>
                           </m:mcs>
                           <m:ctrlPr>
-                            <a:rPr lang="cs-CZ" i="1"/>
+                            <a:rPr lang="cs-CZ" i="1">
+                              <a:latin typeface="Cambria Math" panose="02040503050406030204" pitchFamily="18" charset="0"/>
+                            </a:rPr>
                           </m:ctrlPr>
                         </m:mPr>
                         <m:mr>
                           <m:e>
                             <m:r>
-                              <a:rPr lang="cs-CZ" i="1"/>
+                              <a:rPr lang="cs-CZ" i="1">
+                                <a:latin typeface="Cambria Math" panose="02040503050406030204" pitchFamily="18" charset="0"/>
+                              </a:rPr>
                               <m:t>𝑢</m:t>
                             </m:r>
                             <m:r>
-                              <a:rPr lang="cs-CZ"/>
+                              <a:rPr lang="cs-CZ">
+                                <a:latin typeface="Cambria Math" panose="02040503050406030204" pitchFamily="18" charset="0"/>
+                              </a:rPr>
                               <m:t>⋅</m:t>
                             </m:r>
                             <m:r>
-                              <a:rPr lang="cs-CZ" i="1"/>
+                              <a:rPr lang="cs-CZ" i="1">
+                                <a:latin typeface="Cambria Math" panose="02040503050406030204" pitchFamily="18" charset="0"/>
+                              </a:rPr>
                               <m:t>𝑣</m:t>
                             </m:r>
                           </m:e>
                           <m:e>
                             <m:r>
-                              <a:rPr lang="cs-CZ"/>
+                              <a:rPr lang="cs-CZ">
+                                <a:latin typeface="Cambria Math" panose="02040503050406030204" pitchFamily="18" charset="0"/>
+                              </a:rPr>
                               <m:t>=</m:t>
                             </m:r>
                             <m:nary>
@@ -5031,26 +5230,36 @@
                                 <m:chr m:val="∑"/>
                                 <m:limLoc m:val="undOvr"/>
                                 <m:ctrlPr>
-                                  <a:rPr lang="cs-CZ" i="1"/>
+                                  <a:rPr lang="cs-CZ" i="1">
+                                    <a:latin typeface="Cambria Math" panose="02040503050406030204" pitchFamily="18" charset="0"/>
+                                  </a:rPr>
                                 </m:ctrlPr>
                               </m:naryPr>
                               <m:sub>
                                 <m:r>
-                                  <a:rPr lang="cs-CZ" i="1"/>
+                                  <a:rPr lang="cs-CZ" i="1">
+                                    <a:latin typeface="Cambria Math" panose="02040503050406030204" pitchFamily="18" charset="0"/>
+                                  </a:rPr>
                                   <m:t>𝑖</m:t>
                                 </m:r>
                                 <m:r>
-                                  <a:rPr lang="cs-CZ"/>
+                                  <a:rPr lang="cs-CZ">
+                                    <a:latin typeface="Cambria Math" panose="02040503050406030204" pitchFamily="18" charset="0"/>
+                                  </a:rPr>
                                   <m:t>=</m:t>
                                 </m:r>
                                 <m:r>
-                                  <a:rPr lang="cs-CZ" i="1"/>
+                                  <a:rPr lang="cs-CZ" i="1">
+                                    <a:latin typeface="Cambria Math" panose="02040503050406030204" pitchFamily="18" charset="0"/>
+                                  </a:rPr>
                                   <m:t>1</m:t>
                                 </m:r>
                               </m:sub>
                               <m:sup>
                                 <m:r>
-                                  <a:rPr lang="cs-CZ" i="1"/>
+                                  <a:rPr lang="cs-CZ" i="1">
+                                    <a:latin typeface="Cambria Math" panose="02040503050406030204" pitchFamily="18" charset="0"/>
+                                  </a:rPr>
                                   <m:t>3</m:t>
                                 </m:r>
                               </m:sup>
@@ -5058,18 +5267,24 @@
                                 <m:sSub>
                                   <m:sSubPr>
                                     <m:ctrlPr>
-                                      <a:rPr lang="cs-CZ" i="1"/>
+                                      <a:rPr lang="cs-CZ" i="1">
+                                        <a:latin typeface="Cambria Math" panose="02040503050406030204" pitchFamily="18" charset="0"/>
+                                      </a:rPr>
                                     </m:ctrlPr>
                                   </m:sSubPr>
                                   <m:e>
                                     <m:r>
-                                      <a:rPr lang="cs-CZ" i="1"/>
+                                      <a:rPr lang="cs-CZ" i="1">
+                                        <a:latin typeface="Cambria Math" panose="02040503050406030204" pitchFamily="18" charset="0"/>
+                                      </a:rPr>
                                       <m:t>𝑢</m:t>
                                     </m:r>
                                   </m:e>
                                   <m:sub>
                                     <m:r>
-                                      <a:rPr lang="cs-CZ" i="1"/>
+                                      <a:rPr lang="cs-CZ" i="1">
+                                        <a:latin typeface="Cambria Math" panose="02040503050406030204" pitchFamily="18" charset="0"/>
+                                      </a:rPr>
                                       <m:t>𝑖</m:t>
                                     </m:r>
                                   </m:sub>
@@ -5079,24 +5294,32 @@
                             <m:sSub>
                               <m:sSubPr>
                                 <m:ctrlPr>
-                                  <a:rPr lang="cs-CZ" i="1"/>
+                                  <a:rPr lang="cs-CZ" i="1">
+                                    <a:latin typeface="Cambria Math" panose="02040503050406030204" pitchFamily="18" charset="0"/>
+                                  </a:rPr>
                                 </m:ctrlPr>
                               </m:sSubPr>
                               <m:e>
                                 <m:r>
-                                  <a:rPr lang="cs-CZ" i="1"/>
+                                  <a:rPr lang="cs-CZ" i="1">
+                                    <a:latin typeface="Cambria Math" panose="02040503050406030204" pitchFamily="18" charset="0"/>
+                                  </a:rPr>
                                   <m:t>𝑣</m:t>
                                 </m:r>
                               </m:e>
                               <m:sub>
                                 <m:r>
-                                  <a:rPr lang="cs-CZ" i="1"/>
+                                  <a:rPr lang="cs-CZ" i="1">
+                                    <a:latin typeface="Cambria Math" panose="02040503050406030204" pitchFamily="18" charset="0"/>
+                                  </a:rPr>
                                   <m:t>𝑖</m:t>
                                 </m:r>
                               </m:sub>
                             </m:sSub>
                             <m:r>
-                              <a:rPr lang="cs-CZ"/>
+                              <a:rPr lang="cs-CZ">
+                                <a:latin typeface="Cambria Math" panose="02040503050406030204" pitchFamily="18" charset="0"/>
+                              </a:rPr>
                               <m:t>.</m:t>
                             </m:r>
                           </m:e>
@@ -5104,27 +5327,37 @@
                         <m:mr>
                           <m:e>
                             <m:r>
-                              <a:rPr lang="cs-CZ" i="1"/>
+                              <a:rPr lang="cs-CZ" i="1">
+                                <a:latin typeface="Cambria Math" panose="02040503050406030204" pitchFamily="18" charset="0"/>
+                              </a:rPr>
                               <m:t>𝑢</m:t>
                             </m:r>
                             <m:r>
-                              <a:rPr lang="cs-CZ"/>
+                              <a:rPr lang="cs-CZ">
+                                <a:latin typeface="Cambria Math" panose="02040503050406030204" pitchFamily="18" charset="0"/>
+                              </a:rPr>
                               <m:t>×</m:t>
                             </m:r>
                             <m:r>
-                              <a:rPr lang="cs-CZ" i="1"/>
+                              <a:rPr lang="cs-CZ" i="1">
+                                <a:latin typeface="Cambria Math" panose="02040503050406030204" pitchFamily="18" charset="0"/>
+                              </a:rPr>
                               <m:t>𝑣</m:t>
                             </m:r>
                           </m:e>
                           <m:e>
                             <m:r>
-                              <a:rPr lang="cs-CZ"/>
+                              <a:rPr lang="cs-CZ">
+                                <a:latin typeface="Cambria Math" panose="02040503050406030204" pitchFamily="18" charset="0"/>
+                              </a:rPr>
                               <m:t>=</m:t>
                             </m:r>
                             <m:d>
                               <m:dPr>
                                 <m:ctrlPr>
-                                  <a:rPr lang="cs-CZ" i="1"/>
+                                  <a:rPr lang="cs-CZ" i="1">
+                                    <a:latin typeface="Cambria Math" panose="02040503050406030204" pitchFamily="18" charset="0"/>
+                                  </a:rPr>
                                 </m:ctrlPr>
                               </m:dPr>
                               <m:e>
@@ -5140,7 +5373,9 @@
                                       </m:mc>
                                     </m:mcs>
                                     <m:ctrlPr>
-                                      <a:rPr lang="cs-CZ" i="1"/>
+                                      <a:rPr lang="cs-CZ" i="1">
+                                        <a:latin typeface="Cambria Math" panose="02040503050406030204" pitchFamily="18" charset="0"/>
+                                      </a:rPr>
                                     </m:ctrlPr>
                                   </m:mPr>
                                   <m:mr>
@@ -5150,7 +5385,9 @@
                                           <m:begChr m:val="|"/>
                                           <m:endChr m:val="|"/>
                                           <m:ctrlPr>
-                                            <a:rPr lang="cs-CZ" i="1"/>
+                                            <a:rPr lang="cs-CZ" i="1">
+                                              <a:latin typeface="Cambria Math" panose="02040503050406030204" pitchFamily="18" charset="0"/>
+                                            </a:rPr>
                                           </m:ctrlPr>
                                         </m:dPr>
                                         <m:e>
@@ -5166,7 +5403,9 @@
                                                 </m:mc>
                                               </m:mcs>
                                               <m:ctrlPr>
-                                                <a:rPr lang="cs-CZ" i="1"/>
+                                                <a:rPr lang="cs-CZ" i="1">
+                                                  <a:latin typeface="Cambria Math" panose="02040503050406030204" pitchFamily="18" charset="0"/>
+                                                </a:rPr>
                                               </m:ctrlPr>
                                             </m:mPr>
                                             <m:mr>
@@ -5174,18 +5413,24 @@
                                                 <m:sSub>
                                                   <m:sSubPr>
                                                     <m:ctrlPr>
-                                                      <a:rPr lang="cs-CZ" i="1"/>
+                                                      <a:rPr lang="cs-CZ" i="1">
+                                                        <a:latin typeface="Cambria Math" panose="02040503050406030204" pitchFamily="18" charset="0"/>
+                                                      </a:rPr>
                                                     </m:ctrlPr>
                                                   </m:sSubPr>
                                                   <m:e>
                                                     <m:r>
-                                                      <a:rPr lang="cs-CZ" i="1"/>
+                                                      <a:rPr lang="cs-CZ" i="1">
+                                                        <a:latin typeface="Cambria Math" panose="02040503050406030204" pitchFamily="18" charset="0"/>
+                                                      </a:rPr>
                                                       <m:t>𝑢</m:t>
                                                     </m:r>
                                                   </m:e>
                                                   <m:sub>
                                                     <m:r>
-                                                      <a:rPr lang="cs-CZ" i="1"/>
+                                                      <a:rPr lang="cs-CZ" i="1">
+                                                        <a:latin typeface="Cambria Math" panose="02040503050406030204" pitchFamily="18" charset="0"/>
+                                                      </a:rPr>
                                                       <m:t>2</m:t>
                                                     </m:r>
                                                   </m:sub>
@@ -5195,18 +5440,24 @@
                                                 <m:sSub>
                                                   <m:sSubPr>
                                                     <m:ctrlPr>
-                                                      <a:rPr lang="cs-CZ" i="1"/>
+                                                      <a:rPr lang="cs-CZ" i="1">
+                                                        <a:latin typeface="Cambria Math" panose="02040503050406030204" pitchFamily="18" charset="0"/>
+                                                      </a:rPr>
                                                     </m:ctrlPr>
                                                   </m:sSubPr>
                                                   <m:e>
                                                     <m:r>
-                                                      <a:rPr lang="cs-CZ" i="1"/>
+                                                      <a:rPr lang="cs-CZ" i="1">
+                                                        <a:latin typeface="Cambria Math" panose="02040503050406030204" pitchFamily="18" charset="0"/>
+                                                      </a:rPr>
                                                       <m:t>𝑢</m:t>
                                                     </m:r>
                                                   </m:e>
                                                   <m:sub>
                                                     <m:r>
-                                                      <a:rPr lang="cs-CZ" i="1"/>
+                                                      <a:rPr lang="cs-CZ" i="1">
+                                                        <a:latin typeface="Cambria Math" panose="02040503050406030204" pitchFamily="18" charset="0"/>
+                                                      </a:rPr>
                                                       <m:t>3</m:t>
                                                     </m:r>
                                                   </m:sub>
@@ -5218,18 +5469,24 @@
                                                 <m:sSub>
                                                   <m:sSubPr>
                                                     <m:ctrlPr>
-                                                      <a:rPr lang="cs-CZ" i="1"/>
+                                                      <a:rPr lang="cs-CZ" i="1">
+                                                        <a:latin typeface="Cambria Math" panose="02040503050406030204" pitchFamily="18" charset="0"/>
+                                                      </a:rPr>
                                                     </m:ctrlPr>
                                                   </m:sSubPr>
                                                   <m:e>
                                                     <m:r>
-                                                      <a:rPr lang="cs-CZ" i="1"/>
+                                                      <a:rPr lang="cs-CZ" i="1">
+                                                        <a:latin typeface="Cambria Math" panose="02040503050406030204" pitchFamily="18" charset="0"/>
+                                                      </a:rPr>
                                                       <m:t>𝑣</m:t>
                                                     </m:r>
                                                   </m:e>
                                                   <m:sub>
                                                     <m:r>
-                                                      <a:rPr lang="cs-CZ" i="1"/>
+                                                      <a:rPr lang="cs-CZ" i="1">
+                                                        <a:latin typeface="Cambria Math" panose="02040503050406030204" pitchFamily="18" charset="0"/>
+                                                      </a:rPr>
                                                       <m:t>2</m:t>
                                                     </m:r>
                                                   </m:sub>
@@ -5239,18 +5496,24 @@
                                                 <m:sSub>
                                                   <m:sSubPr>
                                                     <m:ctrlPr>
-                                                      <a:rPr lang="cs-CZ" i="1"/>
+                                                      <a:rPr lang="cs-CZ" i="1">
+                                                        <a:latin typeface="Cambria Math" panose="02040503050406030204" pitchFamily="18" charset="0"/>
+                                                      </a:rPr>
                                                     </m:ctrlPr>
                                                   </m:sSubPr>
                                                   <m:e>
                                                     <m:r>
-                                                      <a:rPr lang="cs-CZ" i="1"/>
+                                                      <a:rPr lang="cs-CZ" i="1">
+                                                        <a:latin typeface="Cambria Math" panose="02040503050406030204" pitchFamily="18" charset="0"/>
+                                                      </a:rPr>
                                                       <m:t>𝑣</m:t>
                                                     </m:r>
                                                   </m:e>
                                                   <m:sub>
                                                     <m:r>
-                                                      <a:rPr lang="cs-CZ" i="1"/>
+                                                      <a:rPr lang="cs-CZ" i="1">
+                                                        <a:latin typeface="Cambria Math" panose="02040503050406030204" pitchFamily="18" charset="0"/>
+                                                      </a:rPr>
                                                       <m:t>3</m:t>
                                                     </m:r>
                                                   </m:sub>
@@ -5261,13 +5524,17 @@
                                         </m:e>
                                       </m:d>
                                       <m:r>
-                                        <a:rPr lang="cs-CZ"/>
+                                        <a:rPr lang="cs-CZ">
+                                          <a:latin typeface="Cambria Math" panose="02040503050406030204" pitchFamily="18" charset="0"/>
+                                        </a:rPr>
                                         <m:t>,</m:t>
                                       </m:r>
                                     </m:e>
                                     <m:e>
                                       <m:r>
-                                        <a:rPr lang="cs-CZ"/>
+                                        <a:rPr lang="cs-CZ">
+                                          <a:latin typeface="Cambria Math" panose="02040503050406030204" pitchFamily="18" charset="0"/>
+                                        </a:rPr>
                                         <m:t>−</m:t>
                                       </m:r>
                                       <m:d>
@@ -5275,7 +5542,9 @@
                                           <m:begChr m:val="|"/>
                                           <m:endChr m:val="|"/>
                                           <m:ctrlPr>
-                                            <a:rPr lang="cs-CZ" i="1"/>
+                                            <a:rPr lang="cs-CZ" i="1">
+                                              <a:latin typeface="Cambria Math" panose="02040503050406030204" pitchFamily="18" charset="0"/>
+                                            </a:rPr>
                                           </m:ctrlPr>
                                         </m:dPr>
                                         <m:e>
@@ -5291,7 +5560,9 @@
                                                 </m:mc>
                                               </m:mcs>
                                               <m:ctrlPr>
-                                                <a:rPr lang="cs-CZ" i="1"/>
+                                                <a:rPr lang="cs-CZ" i="1">
+                                                  <a:latin typeface="Cambria Math" panose="02040503050406030204" pitchFamily="18" charset="0"/>
+                                                </a:rPr>
                                               </m:ctrlPr>
                                             </m:mPr>
                                             <m:mr>
@@ -5299,18 +5570,24 @@
                                                 <m:sSub>
                                                   <m:sSubPr>
                                                     <m:ctrlPr>
-                                                      <a:rPr lang="cs-CZ" i="1"/>
+                                                      <a:rPr lang="cs-CZ" i="1">
+                                                        <a:latin typeface="Cambria Math" panose="02040503050406030204" pitchFamily="18" charset="0"/>
+                                                      </a:rPr>
                                                     </m:ctrlPr>
                                                   </m:sSubPr>
                                                   <m:e>
                                                     <m:r>
-                                                      <a:rPr lang="cs-CZ" i="1"/>
+                                                      <a:rPr lang="cs-CZ" i="1">
+                                                        <a:latin typeface="Cambria Math" panose="02040503050406030204" pitchFamily="18" charset="0"/>
+                                                      </a:rPr>
                                                       <m:t>𝑢</m:t>
                                                     </m:r>
                                                   </m:e>
                                                   <m:sub>
                                                     <m:r>
-                                                      <a:rPr lang="cs-CZ" i="1"/>
+                                                      <a:rPr lang="cs-CZ" i="1">
+                                                        <a:latin typeface="Cambria Math" panose="02040503050406030204" pitchFamily="18" charset="0"/>
+                                                      </a:rPr>
                                                       <m:t>1</m:t>
                                                     </m:r>
                                                   </m:sub>
@@ -5320,18 +5597,24 @@
                                                 <m:sSub>
                                                   <m:sSubPr>
                                                     <m:ctrlPr>
-                                                      <a:rPr lang="cs-CZ" i="1"/>
+                                                      <a:rPr lang="cs-CZ" i="1">
+                                                        <a:latin typeface="Cambria Math" panose="02040503050406030204" pitchFamily="18" charset="0"/>
+                                                      </a:rPr>
                                                     </m:ctrlPr>
                                                   </m:sSubPr>
                                                   <m:e>
                                                     <m:r>
-                                                      <a:rPr lang="cs-CZ" i="1"/>
+                                                      <a:rPr lang="cs-CZ" i="1">
+                                                        <a:latin typeface="Cambria Math" panose="02040503050406030204" pitchFamily="18" charset="0"/>
+                                                      </a:rPr>
                                                       <m:t>𝑢</m:t>
                                                     </m:r>
                                                   </m:e>
                                                   <m:sub>
                                                     <m:r>
-                                                      <a:rPr lang="cs-CZ" i="1"/>
+                                                      <a:rPr lang="cs-CZ" i="1">
+                                                        <a:latin typeface="Cambria Math" panose="02040503050406030204" pitchFamily="18" charset="0"/>
+                                                      </a:rPr>
                                                       <m:t>3</m:t>
                                                     </m:r>
                                                   </m:sub>
@@ -5343,18 +5626,24 @@
                                                 <m:sSub>
                                                   <m:sSubPr>
                                                     <m:ctrlPr>
-                                                      <a:rPr lang="cs-CZ" i="1"/>
+                                                      <a:rPr lang="cs-CZ" i="1">
+                                                        <a:latin typeface="Cambria Math" panose="02040503050406030204" pitchFamily="18" charset="0"/>
+                                                      </a:rPr>
                                                     </m:ctrlPr>
                                                   </m:sSubPr>
                                                   <m:e>
                                                     <m:r>
-                                                      <a:rPr lang="cs-CZ" i="1"/>
+                                                      <a:rPr lang="cs-CZ" i="1">
+                                                        <a:latin typeface="Cambria Math" panose="02040503050406030204" pitchFamily="18" charset="0"/>
+                                                      </a:rPr>
                                                       <m:t>𝑣</m:t>
                                                     </m:r>
                                                   </m:e>
                                                   <m:sub>
                                                     <m:r>
-                                                      <a:rPr lang="cs-CZ" i="1"/>
+                                                      <a:rPr lang="cs-CZ" i="1">
+                                                        <a:latin typeface="Cambria Math" panose="02040503050406030204" pitchFamily="18" charset="0"/>
+                                                      </a:rPr>
                                                       <m:t>1</m:t>
                                                     </m:r>
                                                   </m:sub>
@@ -5364,18 +5653,24 @@
                                                 <m:sSub>
                                                   <m:sSubPr>
                                                     <m:ctrlPr>
-                                                      <a:rPr lang="cs-CZ" i="1"/>
+                                                      <a:rPr lang="cs-CZ" i="1">
+                                                        <a:latin typeface="Cambria Math" panose="02040503050406030204" pitchFamily="18" charset="0"/>
+                                                      </a:rPr>
                                                     </m:ctrlPr>
                                                   </m:sSubPr>
                                                   <m:e>
                                                     <m:r>
-                                                      <a:rPr lang="cs-CZ" i="1"/>
+                                                      <a:rPr lang="cs-CZ" i="1">
+                                                        <a:latin typeface="Cambria Math" panose="02040503050406030204" pitchFamily="18" charset="0"/>
+                                                      </a:rPr>
                                                       <m:t>𝑣</m:t>
                                                     </m:r>
                                                   </m:e>
                                                   <m:sub>
                                                     <m:r>
-                                                      <a:rPr lang="cs-CZ" i="1"/>
+                                                      <a:rPr lang="cs-CZ" i="1">
+                                                        <a:latin typeface="Cambria Math" panose="02040503050406030204" pitchFamily="18" charset="0"/>
+                                                      </a:rPr>
                                                       <m:t>3</m:t>
                                                     </m:r>
                                                   </m:sub>
@@ -5386,7 +5681,9 @@
                                         </m:e>
                                       </m:d>
                                       <m:r>
-                                        <a:rPr lang="cs-CZ"/>
+                                        <a:rPr lang="cs-CZ">
+                                          <a:latin typeface="Cambria Math" panose="02040503050406030204" pitchFamily="18" charset="0"/>
+                                        </a:rPr>
                                         <m:t>,</m:t>
                                       </m:r>
                                     </m:e>
@@ -5396,7 +5693,9 @@
                                           <m:begChr m:val="|"/>
                                           <m:endChr m:val="|"/>
                                           <m:ctrlPr>
-                                            <a:rPr lang="cs-CZ" i="1"/>
+                                            <a:rPr lang="cs-CZ" i="1">
+                                              <a:latin typeface="Cambria Math" panose="02040503050406030204" pitchFamily="18" charset="0"/>
+                                            </a:rPr>
                                           </m:ctrlPr>
                                         </m:dPr>
                                         <m:e>
@@ -5412,7 +5711,9 @@
                                                 </m:mc>
                                               </m:mcs>
                                               <m:ctrlPr>
-                                                <a:rPr lang="cs-CZ" i="1"/>
+                                                <a:rPr lang="cs-CZ" i="1">
+                                                  <a:latin typeface="Cambria Math" panose="02040503050406030204" pitchFamily="18" charset="0"/>
+                                                </a:rPr>
                                               </m:ctrlPr>
                                             </m:mPr>
                                             <m:mr>
@@ -5420,18 +5721,24 @@
                                                 <m:sSub>
                                                   <m:sSubPr>
                                                     <m:ctrlPr>
-                                                      <a:rPr lang="cs-CZ" i="1"/>
+                                                      <a:rPr lang="cs-CZ" i="1">
+                                                        <a:latin typeface="Cambria Math" panose="02040503050406030204" pitchFamily="18" charset="0"/>
+                                                      </a:rPr>
                                                     </m:ctrlPr>
                                                   </m:sSubPr>
                                                   <m:e>
                                                     <m:r>
-                                                      <a:rPr lang="cs-CZ" i="1"/>
+                                                      <a:rPr lang="cs-CZ" i="1">
+                                                        <a:latin typeface="Cambria Math" panose="02040503050406030204" pitchFamily="18" charset="0"/>
+                                                      </a:rPr>
                                                       <m:t>𝑢</m:t>
                                                     </m:r>
                                                   </m:e>
                                                   <m:sub>
                                                     <m:r>
-                                                      <a:rPr lang="cs-CZ" i="1"/>
+                                                      <a:rPr lang="cs-CZ" i="1">
+                                                        <a:latin typeface="Cambria Math" panose="02040503050406030204" pitchFamily="18" charset="0"/>
+                                                      </a:rPr>
                                                       <m:t>1</m:t>
                                                     </m:r>
                                                   </m:sub>
@@ -5441,18 +5748,24 @@
                                                 <m:sSub>
                                                   <m:sSubPr>
                                                     <m:ctrlPr>
-                                                      <a:rPr lang="cs-CZ" i="1"/>
+                                                      <a:rPr lang="cs-CZ" i="1">
+                                                        <a:latin typeface="Cambria Math" panose="02040503050406030204" pitchFamily="18" charset="0"/>
+                                                      </a:rPr>
                                                     </m:ctrlPr>
                                                   </m:sSubPr>
                                                   <m:e>
                                                     <m:r>
-                                                      <a:rPr lang="cs-CZ" i="1"/>
+                                                      <a:rPr lang="cs-CZ" i="1">
+                                                        <a:latin typeface="Cambria Math" panose="02040503050406030204" pitchFamily="18" charset="0"/>
+                                                      </a:rPr>
                                                       <m:t>𝑢</m:t>
                                                     </m:r>
                                                   </m:e>
                                                   <m:sub>
                                                     <m:r>
-                                                      <a:rPr lang="cs-CZ" i="1"/>
+                                                      <a:rPr lang="cs-CZ" i="1">
+                                                        <a:latin typeface="Cambria Math" panose="02040503050406030204" pitchFamily="18" charset="0"/>
+                                                      </a:rPr>
                                                       <m:t>2</m:t>
                                                     </m:r>
                                                   </m:sub>
@@ -5464,18 +5777,24 @@
                                                 <m:sSub>
                                                   <m:sSubPr>
                                                     <m:ctrlPr>
-                                                      <a:rPr lang="cs-CZ" i="1"/>
+                                                      <a:rPr lang="cs-CZ" i="1">
+                                                        <a:latin typeface="Cambria Math" panose="02040503050406030204" pitchFamily="18" charset="0"/>
+                                                      </a:rPr>
                                                     </m:ctrlPr>
                                                   </m:sSubPr>
                                                   <m:e>
                                                     <m:r>
-                                                      <a:rPr lang="cs-CZ" i="1"/>
+                                                      <a:rPr lang="cs-CZ" i="1">
+                                                        <a:latin typeface="Cambria Math" panose="02040503050406030204" pitchFamily="18" charset="0"/>
+                                                      </a:rPr>
                                                       <m:t>𝑣</m:t>
                                                     </m:r>
                                                   </m:e>
                                                   <m:sub>
                                                     <m:r>
-                                                      <a:rPr lang="cs-CZ" i="1"/>
+                                                      <a:rPr lang="cs-CZ" i="1">
+                                                        <a:latin typeface="Cambria Math" panose="02040503050406030204" pitchFamily="18" charset="0"/>
+                                                      </a:rPr>
                                                       <m:t>1</m:t>
                                                     </m:r>
                                                   </m:sub>
@@ -5485,18 +5804,24 @@
                                                 <m:sSub>
                                                   <m:sSubPr>
                                                     <m:ctrlPr>
-                                                      <a:rPr lang="cs-CZ" i="1"/>
+                                                      <a:rPr lang="cs-CZ" i="1">
+                                                        <a:latin typeface="Cambria Math" panose="02040503050406030204" pitchFamily="18" charset="0"/>
+                                                      </a:rPr>
                                                     </m:ctrlPr>
                                                   </m:sSubPr>
                                                   <m:e>
                                                     <m:r>
-                                                      <a:rPr lang="cs-CZ" i="1"/>
+                                                      <a:rPr lang="cs-CZ" i="1">
+                                                        <a:latin typeface="Cambria Math" panose="02040503050406030204" pitchFamily="18" charset="0"/>
+                                                      </a:rPr>
                                                       <m:t>𝑣</m:t>
                                                     </m:r>
                                                   </m:e>
                                                   <m:sub>
                                                     <m:r>
-                                                      <a:rPr lang="cs-CZ" i="1"/>
+                                                      <a:rPr lang="cs-CZ" i="1">
+                                                        <a:latin typeface="Cambria Math" panose="02040503050406030204" pitchFamily="18" charset="0"/>
+                                                      </a:rPr>
                                                       <m:t>2</m:t>
                                                     </m:r>
                                                   </m:sub>
@@ -5512,7 +5837,9 @@
                               </m:e>
                             </m:d>
                             <m:r>
-                              <a:rPr lang="cs-CZ"/>
+                              <a:rPr lang="cs-CZ">
+                                <a:latin typeface="Cambria Math" panose="02040503050406030204" pitchFamily="18" charset="0"/>
+                              </a:rPr>
                               <m:t>.</m:t>
                             </m:r>
                           </m:e>
@@ -5532,7 +5859,7 @@
             </p:txBody>
           </p:sp>
         </mc:Choice>
-        <mc:Fallback>
+        <mc:Fallback xmlns="">
           <p:sp>
             <p:nvSpPr>
               <p:cNvPr id="3" name="Zástupný obsah 2">
@@ -5630,8 +5957,8 @@
           </a:p>
         </p:txBody>
       </p:sp>
-      <mc:AlternateContent xmlns:mc="http://schemas.openxmlformats.org/markup-compatibility/2006">
-        <mc:Choice xmlns:a14="http://schemas.microsoft.com/office/drawing/2010/main" Requires="a14">
+      <mc:AlternateContent xmlns:mc="http://schemas.openxmlformats.org/markup-compatibility/2006" xmlns:a14="http://schemas.microsoft.com/office/drawing/2010/main">
+        <mc:Choice Requires="a14">
           <p:sp>
             <p:nvSpPr>
               <p:cNvPr id="3" name="Zástupný obsah 2">
@@ -5683,15 +6010,21 @@
                 <a14:m>
                   <m:oMath xmlns:m="http://schemas.openxmlformats.org/officeDocument/2006/math">
                     <m:r>
-                      <a:rPr lang="cs-CZ" i="1"/>
+                      <a:rPr lang="cs-CZ" i="1">
+                        <a:latin typeface="Cambria Math" panose="02040503050406030204" pitchFamily="18" charset="0"/>
+                      </a:rPr>
                       <m:t>𝑢</m:t>
                     </m:r>
                     <m:r>
-                      <a:rPr lang="cs-CZ"/>
+                      <a:rPr lang="cs-CZ">
+                        <a:latin typeface="Cambria Math" panose="02040503050406030204" pitchFamily="18" charset="0"/>
+                      </a:rPr>
                       <m:t>,</m:t>
                     </m:r>
                     <m:r>
-                      <a:rPr lang="cs-CZ" i="1"/>
+                      <a:rPr lang="cs-CZ" i="1">
+                        <a:latin typeface="Cambria Math" panose="02040503050406030204" pitchFamily="18" charset="0"/>
+                      </a:rPr>
                       <m:t>𝑣</m:t>
                     </m:r>
                   </m:oMath>
@@ -5723,7 +6056,9 @@
                             </m:mc>
                           </m:mcs>
                           <m:ctrlPr>
-                            <a:rPr lang="cs-CZ" i="1"/>
+                            <a:rPr lang="cs-CZ" i="1">
+                              <a:latin typeface="Cambria Math" panose="02040503050406030204" pitchFamily="18" charset="0"/>
+                            </a:rPr>
                           </m:ctrlPr>
                         </m:mPr>
                         <m:mr>
@@ -5733,12 +6068,16 @@
                                 <m:begChr m:val="‖"/>
                                 <m:endChr m:val="‖"/>
                                 <m:ctrlPr>
-                                  <a:rPr lang="cs-CZ" i="1"/>
+                                  <a:rPr lang="cs-CZ" i="1">
+                                    <a:latin typeface="Cambria Math" panose="02040503050406030204" pitchFamily="18" charset="0"/>
+                                  </a:rPr>
                                 </m:ctrlPr>
                               </m:dPr>
                               <m:e>
                                 <m:r>
-                                  <a:rPr lang="cs-CZ" i="1"/>
+                                  <a:rPr lang="cs-CZ" i="1">
+                                    <a:latin typeface="Cambria Math" panose="02040503050406030204" pitchFamily="18" charset="0"/>
+                                  </a:rPr>
                                   <m:t>𝑢</m:t>
                                 </m:r>
                               </m:e>
@@ -5746,14 +6085,18 @@
                           </m:e>
                           <m:e>
                             <m:r>
-                              <a:rPr lang="cs-CZ"/>
+                              <a:rPr lang="cs-CZ">
+                                <a:latin typeface="Cambria Math" panose="02040503050406030204" pitchFamily="18" charset="0"/>
+                              </a:rPr>
                               <m:t>=</m:t>
                             </m:r>
                             <m:rad>
                               <m:radPr>
                                 <m:degHide m:val="on"/>
                                 <m:ctrlPr>
-                                  <a:rPr lang="cs-CZ" i="1"/>
+                                  <a:rPr lang="cs-CZ" i="1">
+                                    <a:latin typeface="Cambria Math" panose="02040503050406030204" pitchFamily="18" charset="0"/>
+                                  </a:rPr>
                                 </m:ctrlPr>
                               </m:radPr>
                               <m:deg/>
@@ -5761,82 +6104,110 @@
                                 <m:sSubSup>
                                   <m:sSubSupPr>
                                     <m:ctrlPr>
-                                      <a:rPr lang="cs-CZ" i="1"/>
+                                      <a:rPr lang="cs-CZ" i="1">
+                                        <a:latin typeface="Cambria Math" panose="02040503050406030204" pitchFamily="18" charset="0"/>
+                                      </a:rPr>
                                     </m:ctrlPr>
                                   </m:sSubSupPr>
                                   <m:e>
                                     <m:r>
-                                      <a:rPr lang="cs-CZ" i="1"/>
+                                      <a:rPr lang="cs-CZ" i="1">
+                                        <a:latin typeface="Cambria Math" panose="02040503050406030204" pitchFamily="18" charset="0"/>
+                                      </a:rPr>
                                       <m:t>𝑢</m:t>
                                     </m:r>
                                   </m:e>
                                   <m:sub>
                                     <m:r>
-                                      <a:rPr lang="cs-CZ" i="1"/>
+                                      <a:rPr lang="cs-CZ" i="1">
+                                        <a:latin typeface="Cambria Math" panose="02040503050406030204" pitchFamily="18" charset="0"/>
+                                      </a:rPr>
                                       <m:t>1</m:t>
                                     </m:r>
                                   </m:sub>
                                   <m:sup>
                                     <m:r>
-                                      <a:rPr lang="cs-CZ" i="1"/>
+                                      <a:rPr lang="cs-CZ" i="1">
+                                        <a:latin typeface="Cambria Math" panose="02040503050406030204" pitchFamily="18" charset="0"/>
+                                      </a:rPr>
                                       <m:t>2</m:t>
                                     </m:r>
                                   </m:sup>
                                 </m:sSubSup>
                                 <m:r>
-                                  <a:rPr lang="cs-CZ"/>
+                                  <a:rPr lang="cs-CZ">
+                                    <a:latin typeface="Cambria Math" panose="02040503050406030204" pitchFamily="18" charset="0"/>
+                                  </a:rPr>
                                   <m:t>+</m:t>
                                 </m:r>
                                 <m:sSubSup>
                                   <m:sSubSupPr>
                                     <m:ctrlPr>
-                                      <a:rPr lang="cs-CZ" i="1"/>
+                                      <a:rPr lang="cs-CZ" i="1">
+                                        <a:latin typeface="Cambria Math" panose="02040503050406030204" pitchFamily="18" charset="0"/>
+                                      </a:rPr>
                                     </m:ctrlPr>
                                   </m:sSubSupPr>
                                   <m:e>
                                     <m:r>
-                                      <a:rPr lang="cs-CZ" i="1"/>
+                                      <a:rPr lang="cs-CZ" i="1">
+                                        <a:latin typeface="Cambria Math" panose="02040503050406030204" pitchFamily="18" charset="0"/>
+                                      </a:rPr>
                                       <m:t>𝑢</m:t>
                                     </m:r>
                                   </m:e>
                                   <m:sub>
                                     <m:r>
-                                      <a:rPr lang="cs-CZ" i="1"/>
+                                      <a:rPr lang="cs-CZ" i="1">
+                                        <a:latin typeface="Cambria Math" panose="02040503050406030204" pitchFamily="18" charset="0"/>
+                                      </a:rPr>
                                       <m:t>2</m:t>
                                     </m:r>
                                   </m:sub>
                                   <m:sup>
                                     <m:r>
-                                      <a:rPr lang="cs-CZ" i="1"/>
+                                      <a:rPr lang="cs-CZ" i="1">
+                                        <a:latin typeface="Cambria Math" panose="02040503050406030204" pitchFamily="18" charset="0"/>
+                                      </a:rPr>
                                       <m:t>2</m:t>
                                     </m:r>
                                   </m:sup>
                                 </m:sSubSup>
                                 <m:r>
-                                  <a:rPr lang="cs-CZ"/>
+                                  <a:rPr lang="cs-CZ">
+                                    <a:latin typeface="Cambria Math" panose="02040503050406030204" pitchFamily="18" charset="0"/>
+                                  </a:rPr>
                                   <m:t>+</m:t>
                                 </m:r>
                                 <m:sSubSup>
                                   <m:sSubSupPr>
                                     <m:ctrlPr>
-                                      <a:rPr lang="cs-CZ" i="1"/>
+                                      <a:rPr lang="cs-CZ" i="1">
+                                        <a:latin typeface="Cambria Math" panose="02040503050406030204" pitchFamily="18" charset="0"/>
+                                      </a:rPr>
                                     </m:ctrlPr>
                                   </m:sSubSupPr>
                                   <m:e>
                                     <m:r>
-                                      <a:rPr lang="cs-CZ" i="1"/>
+                                      <a:rPr lang="cs-CZ" i="1">
+                                        <a:latin typeface="Cambria Math" panose="02040503050406030204" pitchFamily="18" charset="0"/>
+                                      </a:rPr>
                                       <m:t>𝑢</m:t>
                                     </m:r>
                                   </m:e>
                                   <m:sub>
                                     <m:r>
-                                      <a:rPr lang="cs-CZ" i="1"/>
+                                      <a:rPr lang="cs-CZ" i="1">
+                                        <a:latin typeface="Cambria Math" panose="02040503050406030204" pitchFamily="18" charset="0"/>
+                                      </a:rPr>
                                       <m:t>3</m:t>
                                     </m:r>
                                   </m:sub>
                                   <m:sup>
                                     <m:r>
-                                      <a:rPr lang="cs-CZ" i="1"/>
+                                      <a:rPr lang="cs-CZ" i="1">
+                                        <a:latin typeface="Cambria Math" panose="02040503050406030204" pitchFamily="18" charset="0"/>
+                                      </a:rPr>
                                       <m:t>2</m:t>
                                     </m:r>
                                   </m:sup>
@@ -5844,11 +6215,15 @@
                               </m:e>
                             </m:rad>
                             <m:r>
-                              <a:rPr lang="cs-CZ"/>
+                              <a:rPr lang="cs-CZ">
+                                <a:latin typeface="Cambria Math" panose="02040503050406030204" pitchFamily="18" charset="0"/>
+                              </a:rPr>
                               <m:t>,</m:t>
                             </m:r>
                             <m:r>
-                              <a:rPr lang="cs-CZ" i="1"/>
+                              <a:rPr lang="cs-CZ" i="1">
+                                <a:latin typeface="Cambria Math" panose="02040503050406030204" pitchFamily="18" charset="0"/>
+                              </a:rPr>
                               <m:t>  </m:t>
                             </m:r>
                             <m:d>
@@ -5856,25 +6231,33 @@
                                 <m:begChr m:val="‖"/>
                                 <m:endChr m:val="‖"/>
                                 <m:ctrlPr>
-                                  <a:rPr lang="cs-CZ" i="1"/>
+                                  <a:rPr lang="cs-CZ" i="1">
+                                    <a:latin typeface="Cambria Math" panose="02040503050406030204" pitchFamily="18" charset="0"/>
+                                  </a:rPr>
                                 </m:ctrlPr>
                               </m:dPr>
                               <m:e>
                                 <m:r>
-                                  <a:rPr lang="cs-CZ" i="1"/>
+                                  <a:rPr lang="cs-CZ" i="1">
+                                    <a:latin typeface="Cambria Math" panose="02040503050406030204" pitchFamily="18" charset="0"/>
+                                  </a:rPr>
                                   <m:t>𝑣</m:t>
                                 </m:r>
                               </m:e>
                             </m:d>
                             <m:r>
-                              <a:rPr lang="cs-CZ"/>
+                              <a:rPr lang="cs-CZ">
+                                <a:latin typeface="Cambria Math" panose="02040503050406030204" pitchFamily="18" charset="0"/>
+                              </a:rPr>
                               <m:t>=</m:t>
                             </m:r>
                             <m:rad>
                               <m:radPr>
                                 <m:degHide m:val="on"/>
                                 <m:ctrlPr>
-                                  <a:rPr lang="cs-CZ" i="1"/>
+                                  <a:rPr lang="cs-CZ" i="1">
+                                    <a:latin typeface="Cambria Math" panose="02040503050406030204" pitchFamily="18" charset="0"/>
+                                  </a:rPr>
                                 </m:ctrlPr>
                               </m:radPr>
                               <m:deg/>
@@ -5882,82 +6265,110 @@
                                 <m:sSubSup>
                                   <m:sSubSupPr>
                                     <m:ctrlPr>
-                                      <a:rPr lang="cs-CZ" i="1"/>
+                                      <a:rPr lang="cs-CZ" i="1">
+                                        <a:latin typeface="Cambria Math" panose="02040503050406030204" pitchFamily="18" charset="0"/>
+                                      </a:rPr>
                                     </m:ctrlPr>
                                   </m:sSubSupPr>
                                   <m:e>
                                     <m:r>
-                                      <a:rPr lang="cs-CZ" i="1"/>
+                                      <a:rPr lang="cs-CZ" i="1">
+                                        <a:latin typeface="Cambria Math" panose="02040503050406030204" pitchFamily="18" charset="0"/>
+                                      </a:rPr>
                                       <m:t>𝑣</m:t>
                                     </m:r>
                                   </m:e>
                                   <m:sub>
                                     <m:r>
-                                      <a:rPr lang="cs-CZ" i="1"/>
+                                      <a:rPr lang="cs-CZ" i="1">
+                                        <a:latin typeface="Cambria Math" panose="02040503050406030204" pitchFamily="18" charset="0"/>
+                                      </a:rPr>
                                       <m:t>1</m:t>
                                     </m:r>
                                   </m:sub>
                                   <m:sup>
                                     <m:r>
-                                      <a:rPr lang="cs-CZ" i="1"/>
+                                      <a:rPr lang="cs-CZ" i="1">
+                                        <a:latin typeface="Cambria Math" panose="02040503050406030204" pitchFamily="18" charset="0"/>
+                                      </a:rPr>
                                       <m:t>2</m:t>
                                     </m:r>
                                   </m:sup>
                                 </m:sSubSup>
                                 <m:r>
-                                  <a:rPr lang="cs-CZ"/>
+                                  <a:rPr lang="cs-CZ">
+                                    <a:latin typeface="Cambria Math" panose="02040503050406030204" pitchFamily="18" charset="0"/>
+                                  </a:rPr>
                                   <m:t>+</m:t>
                                 </m:r>
                                 <m:sSubSup>
                                   <m:sSubSupPr>
                                     <m:ctrlPr>
-                                      <a:rPr lang="cs-CZ" i="1"/>
+                                      <a:rPr lang="cs-CZ" i="1">
+                                        <a:latin typeface="Cambria Math" panose="02040503050406030204" pitchFamily="18" charset="0"/>
+                                      </a:rPr>
                                     </m:ctrlPr>
                                   </m:sSubSupPr>
                                   <m:e>
                                     <m:r>
-                                      <a:rPr lang="cs-CZ" i="1"/>
+                                      <a:rPr lang="cs-CZ" i="1">
+                                        <a:latin typeface="Cambria Math" panose="02040503050406030204" pitchFamily="18" charset="0"/>
+                                      </a:rPr>
                                       <m:t>𝑣</m:t>
                                     </m:r>
                                   </m:e>
                                   <m:sub>
                                     <m:r>
-                                      <a:rPr lang="cs-CZ" i="1"/>
+                                      <a:rPr lang="cs-CZ" i="1">
+                                        <a:latin typeface="Cambria Math" panose="02040503050406030204" pitchFamily="18" charset="0"/>
+                                      </a:rPr>
                                       <m:t>2</m:t>
                                     </m:r>
                                   </m:sub>
                                   <m:sup>
                                     <m:r>
-                                      <a:rPr lang="cs-CZ" i="1"/>
+                                      <a:rPr lang="cs-CZ" i="1">
+                                        <a:latin typeface="Cambria Math" panose="02040503050406030204" pitchFamily="18" charset="0"/>
+                                      </a:rPr>
                                       <m:t>2</m:t>
                                     </m:r>
                                   </m:sup>
                                 </m:sSubSup>
                                 <m:r>
-                                  <a:rPr lang="cs-CZ"/>
+                                  <a:rPr lang="cs-CZ">
+                                    <a:latin typeface="Cambria Math" panose="02040503050406030204" pitchFamily="18" charset="0"/>
+                                  </a:rPr>
                                   <m:t>+</m:t>
                                 </m:r>
                                 <m:sSubSup>
                                   <m:sSubSupPr>
                                     <m:ctrlPr>
-                                      <a:rPr lang="cs-CZ" i="1"/>
+                                      <a:rPr lang="cs-CZ" i="1">
+                                        <a:latin typeface="Cambria Math" panose="02040503050406030204" pitchFamily="18" charset="0"/>
+                                      </a:rPr>
                                     </m:ctrlPr>
                                   </m:sSubSupPr>
                                   <m:e>
                                     <m:r>
-                                      <a:rPr lang="cs-CZ" i="1"/>
+                                      <a:rPr lang="cs-CZ" i="1">
+                                        <a:latin typeface="Cambria Math" panose="02040503050406030204" pitchFamily="18" charset="0"/>
+                                      </a:rPr>
                                       <m:t>𝑣</m:t>
                                     </m:r>
                                   </m:e>
                                   <m:sub>
                                     <m:r>
-                                      <a:rPr lang="cs-CZ" i="1"/>
+                                      <a:rPr lang="cs-CZ" i="1">
+                                        <a:latin typeface="Cambria Math" panose="02040503050406030204" pitchFamily="18" charset="0"/>
+                                      </a:rPr>
                                       <m:t>3</m:t>
                                     </m:r>
                                   </m:sub>
                                   <m:sup>
                                     <m:r>
-                                      <a:rPr lang="cs-CZ" i="1"/>
+                                      <a:rPr lang="cs-CZ" i="1">
+                                        <a:latin typeface="Cambria Math" panose="02040503050406030204" pitchFamily="18" charset="0"/>
+                                      </a:rPr>
                                       <m:t>2</m:t>
                                     </m:r>
                                   </m:sup>
@@ -5997,7 +6408,9 @@
                 <a14:m>
                   <m:oMath xmlns:m="http://schemas.openxmlformats.org/officeDocument/2006/math">
                     <m:r>
-                      <a:rPr lang="cs-CZ" i="1"/>
+                      <a:rPr lang="cs-CZ" i="1">
+                        <a:latin typeface="Cambria Math" panose="02040503050406030204" pitchFamily="18" charset="0"/>
+                      </a:rPr>
                       <m:t>𝛼</m:t>
                     </m:r>
                   </m:oMath>
@@ -6025,15 +6438,21 @@
                 <a14:m>
                   <m:oMath xmlns:m="http://schemas.openxmlformats.org/officeDocument/2006/math">
                     <m:r>
-                      <a:rPr lang="cs-CZ" i="1"/>
+                      <a:rPr lang="cs-CZ" i="1">
+                        <a:latin typeface="Cambria Math" panose="02040503050406030204" pitchFamily="18" charset="0"/>
+                      </a:rPr>
                       <m:t>𝑢</m:t>
                     </m:r>
                     <m:r>
-                      <a:rPr lang="cs-CZ"/>
+                      <a:rPr lang="cs-CZ">
+                        <a:latin typeface="Cambria Math" panose="02040503050406030204" pitchFamily="18" charset="0"/>
+                      </a:rPr>
                       <m:t>,</m:t>
                     </m:r>
                     <m:r>
-                      <a:rPr lang="cs-CZ" i="1"/>
+                      <a:rPr lang="cs-CZ" i="1">
+                        <a:latin typeface="Cambria Math" panose="02040503050406030204" pitchFamily="18" charset="0"/>
+                      </a:rPr>
                       <m:t>𝑣</m:t>
                     </m:r>
                   </m:oMath>
@@ -6069,45 +6488,61 @@
                             </m:mc>
                           </m:mcs>
                           <m:ctrlPr>
-                            <a:rPr lang="cs-CZ" i="1"/>
+                            <a:rPr lang="cs-CZ" i="1">
+                              <a:latin typeface="Cambria Math" panose="02040503050406030204" pitchFamily="18" charset="0"/>
+                            </a:rPr>
                           </m:ctrlPr>
                         </m:mPr>
                         <m:mr>
                           <m:e>
                             <m:r>
-                              <a:rPr lang="cs-CZ" i="1"/>
+                              <a:rPr lang="cs-CZ" i="1">
+                                <a:latin typeface="Cambria Math" panose="02040503050406030204" pitchFamily="18" charset="0"/>
+                              </a:rPr>
                               <m:t>𝛼</m:t>
                             </m:r>
                           </m:e>
                           <m:e>
                             <m:r>
-                              <a:rPr lang="cs-CZ"/>
+                              <a:rPr lang="cs-CZ">
+                                <a:latin typeface="Cambria Math" panose="02040503050406030204" pitchFamily="18" charset="0"/>
+                              </a:rPr>
                               <m:t>=</m:t>
                             </m:r>
                             <m:r>
                               <m:rPr>
                                 <m:sty m:val="p"/>
                               </m:rPr>
-                              <a:rPr lang="cs-CZ"/>
+                              <a:rPr lang="cs-CZ">
+                                <a:latin typeface="Cambria Math" panose="02040503050406030204" pitchFamily="18" charset="0"/>
+                              </a:rPr>
                               <m:t>arccos</m:t>
                             </m:r>
                             <m:f>
                               <m:fPr>
                                 <m:ctrlPr>
-                                  <a:rPr lang="cs-CZ" i="1"/>
+                                  <a:rPr lang="cs-CZ" i="1">
+                                    <a:latin typeface="Cambria Math" panose="02040503050406030204" pitchFamily="18" charset="0"/>
+                                  </a:rPr>
                                 </m:ctrlPr>
                               </m:fPr>
                               <m:num>
                                 <m:r>
-                                  <a:rPr lang="cs-CZ" i="1"/>
+                                  <a:rPr lang="cs-CZ" i="1">
+                                    <a:latin typeface="Cambria Math" panose="02040503050406030204" pitchFamily="18" charset="0"/>
+                                  </a:rPr>
                                   <m:t>𝑢</m:t>
                                 </m:r>
                                 <m:r>
-                                  <a:rPr lang="cs-CZ"/>
+                                  <a:rPr lang="cs-CZ">
+                                    <a:latin typeface="Cambria Math" panose="02040503050406030204" pitchFamily="18" charset="0"/>
+                                  </a:rPr>
                                   <m:t>⋅</m:t>
                                 </m:r>
                                 <m:r>
-                                  <a:rPr lang="cs-CZ" i="1"/>
+                                  <a:rPr lang="cs-CZ" i="1">
+                                    <a:latin typeface="Cambria Math" panose="02040503050406030204" pitchFamily="18" charset="0"/>
+                                  </a:rPr>
                                   <m:t>𝑣</m:t>
                                 </m:r>
                               </m:num>
@@ -6117,12 +6552,16 @@
                                     <m:begChr m:val="‖"/>
                                     <m:endChr m:val="‖"/>
                                     <m:ctrlPr>
-                                      <a:rPr lang="cs-CZ" i="1"/>
+                                      <a:rPr lang="cs-CZ" i="1">
+                                        <a:latin typeface="Cambria Math" panose="02040503050406030204" pitchFamily="18" charset="0"/>
+                                      </a:rPr>
                                     </m:ctrlPr>
                                   </m:dPr>
                                   <m:e>
                                     <m:r>
-                                      <a:rPr lang="cs-CZ" i="1"/>
+                                      <a:rPr lang="cs-CZ" i="1">
+                                        <a:latin typeface="Cambria Math" panose="02040503050406030204" pitchFamily="18" charset="0"/>
+                                      </a:rPr>
                                       <m:t>𝑢</m:t>
                                     </m:r>
                                   </m:e>
@@ -6132,12 +6571,16 @@
                                     <m:begChr m:val="‖"/>
                                     <m:endChr m:val="‖"/>
                                     <m:ctrlPr>
-                                      <a:rPr lang="cs-CZ" i="1"/>
+                                      <a:rPr lang="cs-CZ" i="1">
+                                        <a:latin typeface="Cambria Math" panose="02040503050406030204" pitchFamily="18" charset="0"/>
+                                      </a:rPr>
                                     </m:ctrlPr>
                                   </m:dPr>
                                   <m:e>
                                     <m:r>
-                                      <a:rPr lang="cs-CZ" i="1"/>
+                                      <a:rPr lang="cs-CZ" i="1">
+                                        <a:latin typeface="Cambria Math" panose="02040503050406030204" pitchFamily="18" charset="0"/>
+                                      </a:rPr>
                                       <m:t>𝑣</m:t>
                                     </m:r>
                                   </m:e>
@@ -6145,7 +6588,9 @@
                               </m:den>
                             </m:f>
                             <m:r>
-                              <a:rPr lang="cs-CZ"/>
+                              <a:rPr lang="cs-CZ">
+                                <a:latin typeface="Cambria Math" panose="02040503050406030204" pitchFamily="18" charset="0"/>
+                              </a:rPr>
                               <m:t>.</m:t>
                             </m:r>
                           </m:e>
@@ -6165,7 +6610,7 @@
             </p:txBody>
           </p:sp>
         </mc:Choice>
-        <mc:Fallback>
+        <mc:Fallback xmlns="">
           <p:sp>
             <p:nvSpPr>
               <p:cNvPr id="3" name="Zástupný obsah 2">
